--- a/Artificial Intelligence for Enterprises/Assessment3/Huang_26254793_421104_Assessment 3 (slim).pptx
+++ b/Artificial Intelligence for Enterprises/Assessment3/Huang_26254793_421104_Assessment 3 (slim).pptx
@@ -4291,14 +4291,58 @@
       <p:grpSpPr/>
       <p:sp>
         <p:nvSpPr>
-          <p:cNvPr id="2" name="TextBox 1"/>
+          <p:cNvPr id="2" name="Rectangle 1"/>
+          <p:cNvSpPr/>
+          <p:nvPr/>
+        </p:nvSpPr>
+        <p:spPr>
+          <a:xfrm>
+            <a:off x="0" y="0"/>
+            <a:ext cx="310896" cy="6858000"/>
+          </a:xfrm>
+          <a:prstGeom prst="rect">
+            <a:avLst/>
+          </a:prstGeom>
+          <a:solidFill>
+            <a:srgbClr val="1F4E79"/>
+          </a:solidFill>
+          <a:ln>
+            <a:noFill/>
+          </a:ln>
+          <a:effectLst/>
+        </p:spPr>
+        <p:style>
+          <a:lnRef idx="1">
+            <a:schemeClr val="accent1"/>
+          </a:lnRef>
+          <a:fillRef idx="3">
+            <a:schemeClr val="accent1"/>
+          </a:fillRef>
+          <a:effectRef idx="2">
+            <a:schemeClr val="accent1"/>
+          </a:effectRef>
+          <a:fontRef idx="minor">
+            <a:schemeClr val="lt1"/>
+          </a:fontRef>
+        </p:style>
+        <p:txBody>
+          <a:bodyPr rtlCol="0" anchor="ctr"/>
+          <a:lstStyle/>
+          <a:p>
+            <a:pPr algn="ctr"/>
+          </a:p>
+        </p:txBody>
+      </p:sp>
+      <p:sp>
+        <p:nvSpPr>
+          <p:cNvPr id="3" name="TextBox 2"/>
           <p:cNvSpPr txBox="1"/>
           <p:nvPr/>
         </p:nvSpPr>
         <p:spPr>
           <a:xfrm>
-            <a:off x="685800" y="1920240"/>
-            <a:ext cx="10820095" cy="3108960"/>
+            <a:off x="960120" y="1207008"/>
+            <a:ext cx="9814255" cy="1051560"/>
           </a:xfrm>
           <a:prstGeom prst="rect">
             <a:avLst/>
@@ -4306,56 +4350,295 @@
           <a:noFill/>
         </p:spPr>
         <p:txBody>
-          <a:bodyPr wrap="square" anchor="ctr">
+          <a:bodyPr wrap="square" anchor="t">
             <a:spAutoFit/>
           </a:bodyPr>
           <a:lstStyle/>
           <a:p>
-            <a:pPr algn="ctr">
+            <a:pPr algn="l">
               <a:lnSpc>
-                <a:spcPct val="150000"/>
+                <a:spcPct val="125000"/>
               </a:lnSpc>
             </a:pPr>
             <a:r>
-              <a:rPr sz="5400" b="1">
+              <a:rPr sz="4000" b="1">
                 <a:solidFill>
                   <a:srgbClr val="1F4E79"/>
                 </a:solidFill>
                 <a:latin typeface="Microsoft JhengHei"/>
               </a:rPr>
-              <a:t>五個人。</a:t>
-            </a:r>
-          </a:p>
-          <a:p>
-            <a:pPr algn="ctr">
+              <a:t>讓機器讀懂一次事件的完整脈絡</a:t>
+            </a:r>
+          </a:p>
+        </p:txBody>
+      </p:sp>
+      <p:sp>
+        <p:nvSpPr>
+          <p:cNvPr id="4" name="TextBox 3"/>
+          <p:cNvSpPr txBox="1"/>
+          <p:nvPr/>
+        </p:nvSpPr>
+        <p:spPr>
+          <a:xfrm>
+            <a:off x="960120" y="2359152"/>
+            <a:ext cx="9814255" cy="502920"/>
+          </a:xfrm>
+          <a:prstGeom prst="rect">
+            <a:avLst/>
+          </a:prstGeom>
+          <a:noFill/>
+        </p:spPr>
+        <p:txBody>
+          <a:bodyPr wrap="square" anchor="t">
+            <a:spAutoFit/>
+          </a:bodyPr>
+          <a:lstStyle/>
+          <a:p>
+            <a:pPr algn="l">
               <a:lnSpc>
-                <a:spcPct val="150000"/>
+                <a:spcPct val="125000"/>
               </a:lnSpc>
             </a:pPr>
             <a:r>
-              <a:rPr sz="5400" b="1">
+              <a:rPr sz="2000" b="0">
                 <a:solidFill>
-                  <a:srgbClr val="1F4E79"/>
+                  <a:srgbClr val="16212E"/>
                 </a:solidFill>
                 <a:latin typeface="Microsoft JhengHei"/>
               </a:rPr>
-              <a:t>三千支影片。</a:t>
-            </a:r>
-          </a:p>
-          <a:p>
-            <a:pPr algn="ctr">
+              <a:t>地端 AI 事件判讀 —— 六個月、三道決策門的立案提案</a:t>
+            </a:r>
+          </a:p>
+        </p:txBody>
+      </p:sp>
+      <p:sp>
+        <p:nvSpPr>
+          <p:cNvPr id="5" name="Rectangle 4"/>
+          <p:cNvSpPr/>
+          <p:nvPr/>
+        </p:nvSpPr>
+        <p:spPr>
+          <a:xfrm>
+            <a:off x="960120" y="3017520"/>
+            <a:ext cx="2926080" cy="32004"/>
+          </a:xfrm>
+          <a:prstGeom prst="rect">
+            <a:avLst/>
+          </a:prstGeom>
+          <a:solidFill>
+            <a:srgbClr val="E8833A"/>
+          </a:solidFill>
+          <a:ln>
+            <a:noFill/>
+          </a:ln>
+          <a:effectLst/>
+        </p:spPr>
+        <p:style>
+          <a:lnRef idx="1">
+            <a:schemeClr val="accent1"/>
+          </a:lnRef>
+          <a:fillRef idx="3">
+            <a:schemeClr val="accent1"/>
+          </a:fillRef>
+          <a:effectRef idx="2">
+            <a:schemeClr val="accent1"/>
+          </a:effectRef>
+          <a:fontRef idx="minor">
+            <a:schemeClr val="lt1"/>
+          </a:fontRef>
+        </p:style>
+        <p:txBody>
+          <a:bodyPr rtlCol="0" anchor="ctr"/>
+          <a:lstStyle/>
+          <a:p>
+            <a:pPr algn="ctr"/>
+          </a:p>
+        </p:txBody>
+      </p:sp>
+      <p:sp>
+        <p:nvSpPr>
+          <p:cNvPr id="6" name="TextBox 5"/>
+          <p:cNvSpPr txBox="1"/>
+          <p:nvPr/>
+        </p:nvSpPr>
+        <p:spPr>
+          <a:xfrm>
+            <a:off x="960120" y="3310128"/>
+            <a:ext cx="9814255" cy="548640"/>
+          </a:xfrm>
+          <a:prstGeom prst="rect">
+            <a:avLst/>
+          </a:prstGeom>
+          <a:noFill/>
+        </p:spPr>
+        <p:txBody>
+          <a:bodyPr wrap="square" anchor="t">
+            <a:spAutoFit/>
+          </a:bodyPr>
+          <a:lstStyle/>
+          <a:p>
+            <a:pPr algn="l">
               <a:lnSpc>
-                <a:spcPct val="150000"/>
+                <a:spcPct val="125000"/>
               </a:lnSpc>
             </a:pPr>
             <a:r>
-              <a:rPr sz="5400" b="1">
+              <a:rPr sz="1800" b="1">
                 <a:solidFill>
-                  <a:srgbClr val="1F4E79"/>
+                  <a:srgbClr val="E8833A"/>
                 </a:solidFill>
                 <a:latin typeface="Microsoft JhengHei"/>
               </a:rPr>
-              <a:t>兩天。</a:t>
+              <a:t>今天,五個人要看完三千支影片;而客戶要的答案,兩天內。</a:t>
+            </a:r>
+          </a:p>
+        </p:txBody>
+      </p:sp>
+      <p:sp>
+        <p:nvSpPr>
+          <p:cNvPr id="7" name="TextBox 6"/>
+          <p:cNvSpPr txBox="1"/>
+          <p:nvPr/>
+        </p:nvSpPr>
+        <p:spPr>
+          <a:xfrm>
+            <a:off x="960120" y="3968496"/>
+            <a:ext cx="9814255" cy="411480"/>
+          </a:xfrm>
+          <a:prstGeom prst="rect">
+            <a:avLst/>
+          </a:prstGeom>
+          <a:noFill/>
+        </p:spPr>
+        <p:txBody>
+          <a:bodyPr wrap="square" anchor="t">
+            <a:spAutoFit/>
+          </a:bodyPr>
+          <a:lstStyle/>
+          <a:p>
+            <a:pPr algn="l">
+              <a:lnSpc>
+                <a:spcPct val="125000"/>
+              </a:lnSpc>
+            </a:pPr>
+            <a:r>
+              <a:rPr sz="1300" b="0">
+                <a:solidFill>
+                  <a:srgbClr val="6B7885"/>
+                </a:solidFill>
+                <a:latin typeface="Microsoft JhengHei"/>
+              </a:rPr>
+              <a:t>車隊行車影像 AI · 單一大型車隊約 3,000 筆事件/天 · 5 位專職分析人員</a:t>
+            </a:r>
+          </a:p>
+        </p:txBody>
+      </p:sp>
+      <p:sp>
+        <p:nvSpPr>
+          <p:cNvPr id="8" name="TextBox 7"/>
+          <p:cNvSpPr txBox="1"/>
+          <p:nvPr/>
+        </p:nvSpPr>
+        <p:spPr>
+          <a:xfrm>
+            <a:off x="960120" y="4754880"/>
+            <a:ext cx="7939735" cy="960120"/>
+          </a:xfrm>
+          <a:prstGeom prst="rect">
+            <a:avLst/>
+          </a:prstGeom>
+          <a:noFill/>
+        </p:spPr>
+        <p:txBody>
+          <a:bodyPr wrap="square" anchor="t">
+            <a:spAutoFit/>
+          </a:bodyPr>
+          <a:lstStyle/>
+          <a:p>
+            <a:pPr algn="l">
+              <a:lnSpc>
+                <a:spcPct val="135000"/>
+              </a:lnSpc>
+            </a:pPr>
+            <a:r>
+              <a:rPr sz="1500" b="0">
+                <a:solidFill>
+                  <a:srgbClr val="16212E"/>
+                </a:solidFill>
+                <a:latin typeface="Microsoft JhengHei"/>
+              </a:rPr>
+              <a:t>Po-Kai Huang(學號 26254793)</a:t>
+            </a:r>
+          </a:p>
+          <a:p>
+            <a:pPr algn="l">
+              <a:lnSpc>
+                <a:spcPct val="135000"/>
+              </a:lnSpc>
+            </a:pPr>
+            <a:r>
+              <a:rPr sz="1500" b="0">
+                <a:solidFill>
+                  <a:srgbClr val="16212E"/>
+                </a:solidFill>
+                <a:latin typeface="Microsoft JhengHei"/>
+              </a:rPr>
+              <a:t>421104 Artificial Intelligence for Enterprises · Assessment 3</a:t>
+            </a:r>
+          </a:p>
+          <a:p>
+            <a:pPr algn="l">
+              <a:lnSpc>
+                <a:spcPct val="135000"/>
+              </a:lnSpc>
+            </a:pPr>
+            <a:r>
+              <a:rPr sz="1500" b="0">
+                <a:solidFill>
+                  <a:srgbClr val="16212E"/>
+                </a:solidFill>
+                <a:latin typeface="Microsoft JhengHei"/>
+              </a:rPr>
+              <a:t>2026 年 8 月</a:t>
+            </a:r>
+          </a:p>
+        </p:txBody>
+      </p:sp>
+      <p:sp>
+        <p:nvSpPr>
+          <p:cNvPr id="9" name="TextBox 8"/>
+          <p:cNvSpPr txBox="1"/>
+          <p:nvPr/>
+        </p:nvSpPr>
+        <p:spPr>
+          <a:xfrm>
+            <a:off x="960120" y="6199632"/>
+            <a:ext cx="10271455" cy="457200"/>
+          </a:xfrm>
+          <a:prstGeom prst="rect">
+            <a:avLst/>
+          </a:prstGeom>
+          <a:noFill/>
+        </p:spPr>
+        <p:txBody>
+          <a:bodyPr wrap="square" anchor="t">
+            <a:spAutoFit/>
+          </a:bodyPr>
+          <a:lstStyle/>
+          <a:p>
+            <a:pPr algn="l">
+              <a:lnSpc>
+                <a:spcPct val="120000"/>
+              </a:lnSpc>
+            </a:pPr>
+            <a:r>
+              <a:rPr sz="1100" b="0">
+                <a:solidFill>
+                  <a:srgbClr val="6B7885"/>
+                </a:solidFill>
+                <a:latin typeface="Microsoft JhengHei"/>
+              </a:rPr>
+              <a:t>The company name has been changed for commercial in confidence reasons.　內部數字均標示為假設或推算量級,並於各頁附推算方式。</a:t>
             </a:r>
           </a:p>
         </p:txBody>
@@ -4412,7 +4695,7 @@
                 </a:solidFill>
                 <a:latin typeface="Microsoft JhengHei"/>
               </a:rPr>
-              <a:t>六個月 · 六個工作包 · 三道決策門</a:t>
+              <a:t>三道門,每一道都能讓這個案子停下來</a:t>
             </a:r>
           </a:p>
         </p:txBody>
@@ -4576,7 +4859,7 @@
                 </a:solidFill>
                 <a:latin typeface="Microsoft JhengHei"/>
               </a:rPr>
-              <a:t>資源、當責與請求</a:t>
+              <a:t>成本主體是人,不是設備</a:t>
             </a:r>
           </a:p>
         </p:txBody>
@@ -5231,7 +5514,7 @@
                 </a:solidFill>
                 <a:latin typeface="Microsoft JhengHei"/>
               </a:rPr>
-              <a:t>用例:兩階段推論,與它下游那道人工防線</a:t>
+              <a:t>自動化到第二階段就停了</a:t>
             </a:r>
           </a:p>
         </p:txBody>
@@ -5296,8 +5579,8 @@
         </p:blipFill>
         <p:spPr>
           <a:xfrm>
-            <a:off x="792327" y="1664208"/>
-            <a:ext cx="10607040" cy="4069080"/>
+            <a:off x="862884" y="1664208"/>
+            <a:ext cx="10465926" cy="4069080"/>
           </a:xfrm>
           <a:prstGeom prst="rect">
             <a:avLst/>
@@ -5356,7 +5639,7 @@
                 </a:solidFill>
                 <a:latin typeface="Microsoft JhengHei"/>
               </a:rPr>
-              <a:t>為什麼是現在:工作量沒變多,客戶要的時效變了</a:t>
+              <a:t>工作量沒變多,客戶要的時效變了</a:t>
             </a:r>
           </a:p>
         </p:txBody>
@@ -5405,87 +5688,9 @@
           </a:p>
         </p:txBody>
       </p:sp>
-      <p:sp>
-        <p:nvSpPr>
-          <p:cNvPr id="4" name="TextBox 3"/>
-          <p:cNvSpPr txBox="1"/>
-          <p:nvPr/>
-        </p:nvSpPr>
-        <p:spPr>
-          <a:xfrm>
-            <a:off x="685800" y="1481328"/>
-            <a:ext cx="10820095" cy="411480"/>
-          </a:xfrm>
-          <a:prstGeom prst="rect">
-            <a:avLst/>
-          </a:prstGeom>
-          <a:noFill/>
-        </p:spPr>
-        <p:txBody>
-          <a:bodyPr wrap="square" anchor="t">
-            <a:spAutoFit/>
-          </a:bodyPr>
-          <a:lstStyle/>
-          <a:p>
-            <a:pPr algn="l">
-              <a:lnSpc>
-                <a:spcPct val="125000"/>
-              </a:lnSpc>
-            </a:pPr>
-            <a:r>
-              <a:rPr sz="1800" b="0">
-                <a:solidFill>
-                  <a:srgbClr val="16212E"/>
-                </a:solidFill>
-                <a:latin typeface="Microsoft JhengHei"/>
-              </a:rPr>
-              <a:t>・現況約半數爭議超過兩天</a:t>
-            </a:r>
-          </a:p>
-        </p:txBody>
-      </p:sp>
-      <p:sp>
-        <p:nvSpPr>
-          <p:cNvPr id="5" name="TextBox 4"/>
-          <p:cNvSpPr txBox="1"/>
-          <p:nvPr/>
-        </p:nvSpPr>
-        <p:spPr>
-          <a:xfrm>
-            <a:off x="685800" y="1920240"/>
-            <a:ext cx="10820095" cy="411480"/>
-          </a:xfrm>
-          <a:prstGeom prst="rect">
-            <a:avLst/>
-          </a:prstGeom>
-          <a:noFill/>
-        </p:spPr>
-        <p:txBody>
-          <a:bodyPr wrap="square" anchor="t">
-            <a:spAutoFit/>
-          </a:bodyPr>
-          <a:lstStyle/>
-          <a:p>
-            <a:pPr algn="l">
-              <a:lnSpc>
-                <a:spcPct val="125000"/>
-              </a:lnSpc>
-            </a:pPr>
-            <a:r>
-              <a:rPr sz="1800" b="0">
-                <a:solidFill>
-                  <a:srgbClr val="16212E"/>
-                </a:solidFill>
-                <a:latin typeface="Microsoft JhengHei"/>
-              </a:rPr>
-              <a:t>・客戶要的是兩天內、單純案件當天</a:t>
-            </a:r>
-          </a:p>
-        </p:txBody>
-      </p:sp>
       <p:pic>
         <p:nvPicPr>
-          <p:cNvPr id="6" name="Picture 5" descr="s02_timeline.png"/>
+          <p:cNvPr id="4" name="Picture 3" descr="s02_timeline.png"/>
           <p:cNvPicPr>
             <a:picLocks noChangeAspect="1"/>
           </p:cNvPicPr>
@@ -5499,8 +5704,8 @@
         </p:blipFill>
         <p:spPr>
           <a:xfrm>
-            <a:off x="1507408" y="2212848"/>
-            <a:ext cx="9176877" cy="3520440"/>
+            <a:off x="792327" y="1664208"/>
+            <a:ext cx="10607040" cy="4069080"/>
           </a:xfrm>
           <a:prstGeom prst="rect">
             <a:avLst/>
@@ -5559,7 +5764,7 @@
                 </a:solidFill>
                 <a:latin typeface="Microsoft JhengHei"/>
               </a:rPr>
-              <a:t>發現過程:兩種病,兩個缺口</a:t>
+              <a:t>不是一種病,是兩種</a:t>
             </a:r>
           </a:p>
         </p:txBody>
@@ -5684,7 +5889,7 @@
                 </a:solidFill>
                 <a:latin typeface="Microsoft JhengHei"/>
               </a:rPr>
-              <a:t>我們看不見的那一半:有資料,沒有習慣</a:t>
+              <a:t>我們量得到誤報,量不到漏放</a:t>
             </a:r>
           </a:p>
         </p:txBody>
@@ -5809,7 +6014,7 @@
                 </a:solidFill>
                 <a:latin typeface="Microsoft JhengHei"/>
               </a:rPr>
-              <a:t>五條路,含三條不用 AI</a:t>
+              <a:t>五條路,我選的這條有停止條件</a:t>
             </a:r>
           </a:p>
         </p:txBody>
@@ -5934,7 +6139,7 @@
                 </a:solidFill>
                 <a:latin typeface="Microsoft JhengHei"/>
               </a:rPr>
-              <a:t>風險:七類十條</a:t>
+              <a:t>選了這條,我先講它會出什麼事</a:t>
             </a:r>
           </a:p>
         </p:txBody>
@@ -6098,7 +6303,7 @@
                 </a:solidFill>
                 <a:latin typeface="Microsoft JhengHei"/>
               </a:rPr>
-              <a:t>倫理:對照澳洲 AI 倫理八原則(2019)</a:t>
+              <a:t>這個方案的代價,我自己標紅</a:t>
             </a:r>
           </a:p>
         </p:txBody>
@@ -6223,7 +6428,7 @@
                 </a:solidFill>
                 <a:latin typeface="Microsoft JhengHei"/>
               </a:rPr>
-              <a:t>怎麼算成功:三層 KPI,一條回圈</a:t>
+              <a:t>護欄層可以一票否決上面兩層</a:t>
             </a:r>
           </a:p>
         </p:txBody>
